--- a/chapter5/parts/part-08-python-cleaning-tools/clip.pptx
+++ b/chapter5/parts/part-08-python-cleaning-tools/clip.pptx
@@ -4257,10 +4257,12 @@
           </a:bodyPr>
           <a:lstStyle/>
           <a:p>
-            <a:pPr>
+            <a:pPr lvl="0" marL="457200" indent="-228600">
+              <a:buFont typeface="Calibri"/>
               <a:spcAft>
                 <a:spcPts val="1000"/>
               </a:spcAft>
+              <a:buSzPct val="100000"/>
               <a:buChar char="•"/>
               <a:lnSpc>
                 <a:spcPts val="2200"/>
@@ -4277,10 +4279,12 @@
             </a:r>
           </a:p>
           <a:p>
-            <a:pPr>
+            <a:pPr lvl="0" marL="457200" indent="-228600">
+              <a:buFont typeface="Calibri"/>
               <a:spcAft>
                 <a:spcPts val="1000"/>
               </a:spcAft>
+              <a:buSzPct val="100000"/>
               <a:buChar char="•"/>
               <a:lnSpc>
                 <a:spcPts val="2200"/>
@@ -4297,10 +4301,12 @@
             </a:r>
           </a:p>
           <a:p>
-            <a:pPr>
+            <a:pPr lvl="0" marL="457200" indent="-228600">
+              <a:buFont typeface="Calibri"/>
               <a:spcAft>
                 <a:spcPts val="1000"/>
               </a:spcAft>
+              <a:buSzPct val="100000"/>
               <a:buChar char="•"/>
               <a:lnSpc>
                 <a:spcPts val="2200"/>
@@ -4436,10 +4442,12 @@
           </a:bodyPr>
           <a:lstStyle/>
           <a:p>
-            <a:pPr>
+            <a:pPr lvl="0" marL="457200" indent="-228600">
+              <a:buFont typeface="Calibri"/>
               <a:spcAft>
                 <a:spcPts val="1000"/>
               </a:spcAft>
+              <a:buSzPct val="100000"/>
               <a:buChar char="•"/>
               <a:lnSpc>
                 <a:spcPts val="2200"/>
@@ -4456,10 +4464,12 @@
             </a:r>
           </a:p>
           <a:p>
-            <a:pPr>
+            <a:pPr lvl="0" marL="457200" indent="-228600">
+              <a:buFont typeface="Calibri"/>
               <a:spcAft>
                 <a:spcPts val="1000"/>
               </a:spcAft>
+              <a:buSzPct val="100000"/>
               <a:buChar char="•"/>
               <a:lnSpc>
                 <a:spcPts val="2200"/>
@@ -4595,10 +4605,12 @@
           </a:bodyPr>
           <a:lstStyle/>
           <a:p>
-            <a:pPr>
+            <a:pPr lvl="0" marL="457200" indent="-228600">
+              <a:buFont typeface="Calibri"/>
               <a:spcAft>
                 <a:spcPts val="1000"/>
               </a:spcAft>
+              <a:buSzPct val="100000"/>
               <a:buChar char="•"/>
               <a:lnSpc>
                 <a:spcPts val="2200"/>
@@ -4615,10 +4627,12 @@
             </a:r>
           </a:p>
           <a:p>
-            <a:pPr>
+            <a:pPr lvl="0" marL="457200" indent="-228600">
+              <a:buFont typeface="Calibri"/>
               <a:spcAft>
                 <a:spcPts val="1000"/>
               </a:spcAft>
+              <a:buSzPct val="100000"/>
               <a:buChar char="•"/>
               <a:lnSpc>
                 <a:spcPts val="2200"/>
@@ -4635,10 +4649,12 @@
             </a:r>
           </a:p>
           <a:p>
-            <a:pPr>
+            <a:pPr lvl="0" marL="457200" indent="-228600">
+              <a:buFont typeface="Calibri"/>
               <a:spcAft>
                 <a:spcPts val="1000"/>
               </a:spcAft>
+              <a:buSzPct val="100000"/>
               <a:buChar char="•"/>
               <a:lnSpc>
                 <a:spcPts val="2200"/>
@@ -4774,10 +4790,12 @@
           </a:bodyPr>
           <a:lstStyle/>
           <a:p>
-            <a:pPr>
+            <a:pPr lvl="0" marL="457200" indent="-228600">
+              <a:buFont typeface="Calibri"/>
               <a:spcAft>
                 <a:spcPts val="1000"/>
               </a:spcAft>
+              <a:buSzPct val="100000"/>
               <a:buChar char="•"/>
               <a:lnSpc>
                 <a:spcPts val="2200"/>
@@ -4794,10 +4812,12 @@
             </a:r>
           </a:p>
           <a:p>
-            <a:pPr>
+            <a:pPr lvl="0" marL="457200" indent="-228600">
+              <a:buFont typeface="Calibri"/>
               <a:spcAft>
                 <a:spcPts val="1000"/>
               </a:spcAft>
+              <a:buSzPct val="100000"/>
               <a:buChar char="•"/>
               <a:lnSpc>
                 <a:spcPts val="2200"/>
@@ -4814,10 +4834,12 @@
             </a:r>
           </a:p>
           <a:p>
-            <a:pPr>
+            <a:pPr lvl="0" marL="457200" indent="-228600">
+              <a:buFont typeface="Calibri"/>
               <a:spcAft>
                 <a:spcPts val="1000"/>
               </a:spcAft>
+              <a:buSzPct val="100000"/>
               <a:buChar char="•"/>
               <a:lnSpc>
                 <a:spcPts val="2200"/>
@@ -4953,10 +4975,12 @@
           </a:bodyPr>
           <a:lstStyle/>
           <a:p>
-            <a:pPr>
+            <a:pPr lvl="0" marL="457200" indent="-228600">
+              <a:buFont typeface="Calibri"/>
               <a:spcAft>
                 <a:spcPts val="1000"/>
               </a:spcAft>
+              <a:buSzPct val="100000"/>
               <a:buChar char="•"/>
               <a:lnSpc>
                 <a:spcPts val="2200"/>
@@ -4973,10 +4997,12 @@
             </a:r>
           </a:p>
           <a:p>
-            <a:pPr>
+            <a:pPr lvl="0" marL="457200" indent="-228600">
+              <a:buFont typeface="Calibri"/>
               <a:spcAft>
                 <a:spcPts val="1000"/>
               </a:spcAft>
+              <a:buSzPct val="100000"/>
               <a:buChar char="•"/>
               <a:lnSpc>
                 <a:spcPts val="2200"/>
@@ -4993,10 +5019,12 @@
             </a:r>
           </a:p>
           <a:p>
-            <a:pPr>
+            <a:pPr lvl="0" marL="457200" indent="-228600">
+              <a:buFont typeface="Calibri"/>
               <a:spcAft>
                 <a:spcPts val="1000"/>
               </a:spcAft>
+              <a:buSzPct val="100000"/>
               <a:buChar char="•"/>
               <a:lnSpc>
                 <a:spcPts val="2200"/>
@@ -5013,10 +5041,12 @@
             </a:r>
           </a:p>
           <a:p>
-            <a:pPr>
+            <a:pPr lvl="0" marL="457200" indent="-228600">
+              <a:buFont typeface="Calibri"/>
               <a:spcAft>
                 <a:spcPts val="1000"/>
               </a:spcAft>
+              <a:buSzPct val="100000"/>
               <a:buChar char="•"/>
               <a:lnSpc>
                 <a:spcPts val="2200"/>
@@ -5349,10 +5379,12 @@
           </a:bodyPr>
           <a:lstStyle/>
           <a:p>
-            <a:pPr>
+            <a:pPr lvl="0" marL="457200" indent="-228600">
+              <a:buFont typeface="Calibri"/>
               <a:spcAft>
                 <a:spcPts val="1000"/>
               </a:spcAft>
+              <a:buSzPct val="100000"/>
               <a:buChar char="•"/>
               <a:lnSpc>
                 <a:spcPts val="2200"/>
@@ -5369,10 +5401,12 @@
             </a:r>
           </a:p>
           <a:p>
-            <a:pPr>
+            <a:pPr lvl="0" marL="457200" indent="-228600">
+              <a:buFont typeface="Calibri"/>
               <a:spcAft>
                 <a:spcPts val="1000"/>
               </a:spcAft>
+              <a:buSzPct val="100000"/>
               <a:buChar char="•"/>
               <a:lnSpc>
                 <a:spcPts val="2200"/>
@@ -5389,10 +5423,12 @@
             </a:r>
           </a:p>
           <a:p>
-            <a:pPr>
+            <a:pPr lvl="0" marL="457200" indent="-228600">
+              <a:buFont typeface="Calibri"/>
               <a:spcAft>
                 <a:spcPts val="1000"/>
               </a:spcAft>
+              <a:buSzPct val="100000"/>
               <a:buChar char="•"/>
               <a:lnSpc>
                 <a:spcPts val="2200"/>
@@ -5528,10 +5564,12 @@
           </a:bodyPr>
           <a:lstStyle/>
           <a:p>
-            <a:pPr>
+            <a:pPr lvl="0" marL="457200" indent="-228600">
+              <a:buFont typeface="Calibri"/>
               <a:spcAft>
                 <a:spcPts val="1000"/>
               </a:spcAft>
+              <a:buSzPct val="100000"/>
               <a:buChar char="•"/>
               <a:lnSpc>
                 <a:spcPts val="2200"/>
@@ -5548,10 +5586,12 @@
             </a:r>
           </a:p>
           <a:p>
-            <a:pPr>
+            <a:pPr lvl="0" marL="457200" indent="-228600">
+              <a:buFont typeface="Calibri"/>
               <a:spcAft>
                 <a:spcPts val="1000"/>
               </a:spcAft>
+              <a:buSzPct val="100000"/>
               <a:buChar char="•"/>
               <a:lnSpc>
                 <a:spcPts val="2200"/>
@@ -5568,10 +5608,12 @@
             </a:r>
           </a:p>
           <a:p>
-            <a:pPr>
+            <a:pPr lvl="0" marL="457200" indent="-228600">
+              <a:buFont typeface="Calibri"/>
               <a:spcAft>
                 <a:spcPts val="1000"/>
               </a:spcAft>
+              <a:buSzPct val="100000"/>
               <a:buChar char="•"/>
               <a:lnSpc>
                 <a:spcPts val="2200"/>
@@ -5588,10 +5630,12 @@
             </a:r>
           </a:p>
           <a:p>
-            <a:pPr>
+            <a:pPr lvl="0" marL="457200" indent="-228600">
+              <a:buFont typeface="Calibri"/>
               <a:spcAft>
                 <a:spcPts val="1000"/>
               </a:spcAft>
+              <a:buSzPct val="100000"/>
               <a:buChar char="•"/>
               <a:lnSpc>
                 <a:spcPts val="2200"/>
@@ -6171,10 +6215,12 @@
           </a:bodyPr>
           <a:lstStyle/>
           <a:p>
-            <a:pPr>
+            <a:pPr lvl="0" marL="457200" indent="-228600">
+              <a:buFont typeface="Calibri"/>
               <a:spcAft>
                 <a:spcPts val="1000"/>
               </a:spcAft>
+              <a:buSzPct val="100000"/>
               <a:buChar char="•"/>
               <a:lnSpc>
                 <a:spcPts val="2200"/>
@@ -6191,10 +6237,12 @@
             </a:r>
           </a:p>
           <a:p>
-            <a:pPr>
+            <a:pPr lvl="0" marL="457200" indent="-228600">
+              <a:buFont typeface="Calibri"/>
               <a:spcAft>
                 <a:spcPts val="1000"/>
               </a:spcAft>
+              <a:buSzPct val="100000"/>
               <a:buChar char="•"/>
               <a:lnSpc>
                 <a:spcPts val="2200"/>
@@ -6211,10 +6259,12 @@
             </a:r>
           </a:p>
           <a:p>
-            <a:pPr>
+            <a:pPr lvl="0" marL="457200" indent="-228600">
+              <a:buFont typeface="Calibri"/>
               <a:spcAft>
                 <a:spcPts val="1000"/>
               </a:spcAft>
+              <a:buSzPct val="100000"/>
               <a:buChar char="•"/>
               <a:lnSpc>
                 <a:spcPts val="2200"/>
